--- a/03-build/pptx/C4_U7_docente.pptx
+++ b/03-build/pptx/C4_U7_docente.pptx
@@ -4807,7 +4807,6 @@
               <a:srgbClr val="D64550"/>
             </a:solidFill>
           </a:ln>
-          <a:effectLst/>
           <a:effectLst>
             <a:outerShdw blurRad="90000" dist="38000" dir="5400000" rotWithShape="0">
               <a:srgbClr val="20242E">
@@ -4995,7 +4994,6 @@
               <a:srgbClr val="E4E3DE"/>
             </a:solidFill>
           </a:ln>
-          <a:effectLst/>
           <a:effectLst>
             <a:outerShdw blurRad="90000" dist="38000" dir="5400000" rotWithShape="0">
               <a:srgbClr val="20242E">
@@ -5720,7 +5718,6 @@
               <a:srgbClr val="E4E3DE"/>
             </a:solidFill>
           </a:ln>
-          <a:effectLst/>
           <a:effectLst>
             <a:outerShdw blurRad="90000" dist="38000" dir="5400000" rotWithShape="0">
               <a:srgbClr val="20242E">
@@ -5864,7 +5861,6 @@
               <a:srgbClr val="E4E3DE"/>
             </a:solidFill>
           </a:ln>
-          <a:effectLst/>
           <a:effectLst>
             <a:outerShdw blurRad="90000" dist="38000" dir="5400000" rotWithShape="0">
               <a:srgbClr val="20242E">
@@ -6008,7 +6004,6 @@
               <a:srgbClr val="E4E3DE"/>
             </a:solidFill>
           </a:ln>
-          <a:effectLst/>
           <a:effectLst>
             <a:outerShdw blurRad="90000" dist="38000" dir="5400000" rotWithShape="0">
               <a:srgbClr val="20242E">
@@ -6152,7 +6147,6 @@
               <a:srgbClr val="E4E3DE"/>
             </a:solidFill>
           </a:ln>
-          <a:effectLst/>
           <a:effectLst>
             <a:outerShdw blurRad="90000" dist="38000" dir="5400000" rotWithShape="0">
               <a:srgbClr val="20242E">
@@ -6296,7 +6290,6 @@
               <a:srgbClr val="E4E3DE"/>
             </a:solidFill>
           </a:ln>
-          <a:effectLst/>
           <a:effectLst>
             <a:outerShdw blurRad="90000" dist="38000" dir="5400000" rotWithShape="0">
               <a:srgbClr val="20242E">
@@ -6440,7 +6433,6 @@
               <a:srgbClr val="E4E3DE"/>
             </a:solidFill>
           </a:ln>
-          <a:effectLst/>
           <a:effectLst>
             <a:outerShdw blurRad="90000" dist="38000" dir="5400000" rotWithShape="0">
               <a:srgbClr val="20242E">
@@ -6584,7 +6576,6 @@
               <a:srgbClr val="D64550"/>
             </a:solidFill>
           </a:ln>
-          <a:effectLst/>
           <a:effectLst>
             <a:outerShdw blurRad="90000" dist="38000" dir="5400000" rotWithShape="0">
               <a:srgbClr val="20242E">
@@ -7221,7 +7212,6 @@
               <a:srgbClr val="D64550"/>
             </a:solidFill>
           </a:ln>
-          <a:effectLst/>
           <a:effectLst>
             <a:outerShdw blurRad="90000" dist="38000" dir="5400000" rotWithShape="0">
               <a:srgbClr val="20242E">
@@ -7481,7 +7471,6 @@
               <a:srgbClr val="D64550"/>
             </a:solidFill>
           </a:ln>
-          <a:effectLst/>
           <a:effectLst>
             <a:outerShdw blurRad="90000" dist="38000" dir="5400000" rotWithShape="0">
               <a:srgbClr val="20242E">
@@ -8260,7 +8249,6 @@
               <a:srgbClr val="E4E3DE"/>
             </a:solidFill>
           </a:ln>
-          <a:effectLst/>
           <a:effectLst>
             <a:outerShdw blurRad="90000" dist="38000" dir="5400000" rotWithShape="0">
               <a:srgbClr val="20242E">
@@ -8414,7 +8402,6 @@
               <a:srgbClr val="E4E3DE"/>
             </a:solidFill>
           </a:ln>
-          <a:effectLst/>
           <a:effectLst>
             <a:outerShdw blurRad="90000" dist="38000" dir="5400000" rotWithShape="0">
               <a:srgbClr val="20242E">
@@ -8568,7 +8555,6 @@
               <a:srgbClr val="E4E3DE"/>
             </a:solidFill>
           </a:ln>
-          <a:effectLst/>
           <a:effectLst>
             <a:outerShdw blurRad="90000" dist="38000" dir="5400000" rotWithShape="0">
               <a:srgbClr val="20242E">
@@ -8722,7 +8708,6 @@
               <a:srgbClr val="E4E3DE"/>
             </a:solidFill>
           </a:ln>
-          <a:effectLst/>
           <a:effectLst>
             <a:outerShdw blurRad="90000" dist="38000" dir="5400000" rotWithShape="0">
               <a:srgbClr val="20242E">
@@ -8876,7 +8861,6 @@
               <a:srgbClr val="D64550"/>
             </a:solidFill>
           </a:ln>
-          <a:effectLst/>
           <a:effectLst>
             <a:outerShdw blurRad="90000" dist="38000" dir="5400000" rotWithShape="0">
               <a:srgbClr val="20242E">
@@ -9030,7 +9014,6 @@
               <a:srgbClr val="E4E3DE"/>
             </a:solidFill>
           </a:ln>
-          <a:effectLst/>
           <a:effectLst>
             <a:outerShdw blurRad="90000" dist="38000" dir="5400000" rotWithShape="0">
               <a:srgbClr val="20242E">
@@ -9184,7 +9167,6 @@
               <a:srgbClr val="E4E3DE"/>
             </a:solidFill>
           </a:ln>
-          <a:effectLst/>
           <a:effectLst>
             <a:outerShdw blurRad="90000" dist="38000" dir="5400000" rotWithShape="0">
               <a:srgbClr val="20242E">
@@ -9338,7 +9320,6 @@
               <a:srgbClr val="E4E3DE"/>
             </a:solidFill>
           </a:ln>
-          <a:effectLst/>
           <a:effectLst>
             <a:outerShdw blurRad="90000" dist="38000" dir="5400000" rotWithShape="0">
               <a:srgbClr val="20242E">
@@ -9492,7 +9473,6 @@
               <a:srgbClr val="E4E3DE"/>
             </a:solidFill>
           </a:ln>
-          <a:effectLst/>
           <a:effectLst>
             <a:outerShdw blurRad="90000" dist="38000" dir="5400000" rotWithShape="0">
               <a:srgbClr val="20242E">
@@ -9646,7 +9626,6 @@
               <a:srgbClr val="E4E3DE"/>
             </a:solidFill>
           </a:ln>
-          <a:effectLst/>
           <a:effectLst>
             <a:outerShdw blurRad="90000" dist="38000" dir="5400000" rotWithShape="0">
               <a:srgbClr val="20242E">
@@ -9800,7 +9779,6 @@
               <a:srgbClr val="E4E3DE"/>
             </a:solidFill>
           </a:ln>
-          <a:effectLst/>
           <a:effectLst>
             <a:outerShdw blurRad="90000" dist="38000" dir="5400000" rotWithShape="0">
               <a:srgbClr val="20242E">
@@ -9954,7 +9932,6 @@
               <a:srgbClr val="E4E3DE"/>
             </a:solidFill>
           </a:ln>
-          <a:effectLst/>
           <a:effectLst>
             <a:outerShdw blurRad="90000" dist="38000" dir="5400000" rotWithShape="0">
               <a:srgbClr val="20242E">
@@ -10108,7 +10085,6 @@
               <a:srgbClr val="E4E3DE"/>
             </a:solidFill>
           </a:ln>
-          <a:effectLst/>
           <a:effectLst>
             <a:outerShdw blurRad="90000" dist="38000" dir="5400000" rotWithShape="0">
               <a:srgbClr val="20242E">
@@ -10262,7 +10238,6 @@
               <a:srgbClr val="E4E3DE"/>
             </a:solidFill>
           </a:ln>
-          <a:effectLst/>
           <a:effectLst>
             <a:outerShdw blurRad="90000" dist="38000" dir="5400000" rotWithShape="0">
               <a:srgbClr val="20242E">
@@ -10416,7 +10391,6 @@
               <a:srgbClr val="D64550"/>
             </a:solidFill>
           </a:ln>
-          <a:effectLst/>
           <a:effectLst>
             <a:outerShdw blurRad="90000" dist="38000" dir="5400000" rotWithShape="0">
               <a:srgbClr val="20242E">
@@ -10570,7 +10544,6 @@
               <a:srgbClr val="D64550"/>
             </a:solidFill>
           </a:ln>
-          <a:effectLst/>
           <a:effectLst>
             <a:outerShdw blurRad="90000" dist="38000" dir="5400000" rotWithShape="0">
               <a:srgbClr val="20242E">
@@ -11207,7 +11180,6 @@
               <a:srgbClr val="E4E3DE"/>
             </a:solidFill>
           </a:ln>
-          <a:effectLst/>
           <a:effectLst>
             <a:outerShdw blurRad="90000" dist="38000" dir="5400000" rotWithShape="0">
               <a:srgbClr val="20242E">
@@ -11483,7 +11455,6 @@
               <a:srgbClr val="D64550"/>
             </a:solidFill>
           </a:ln>
-          <a:effectLst/>
           <a:effectLst>
             <a:outerShdw blurRad="90000" dist="38000" dir="5400000" rotWithShape="0">
               <a:srgbClr val="20242E">
@@ -12943,7 +12914,6 @@
               <a:srgbClr val="E4E3DE"/>
             </a:solidFill>
           </a:ln>
-          <a:effectLst/>
           <a:effectLst>
             <a:outerShdw blurRad="90000" dist="38000" dir="5400000" rotWithShape="0">
               <a:srgbClr val="20242E">
@@ -13112,7 +13082,6 @@
               <a:srgbClr val="E4E3DE"/>
             </a:solidFill>
           </a:ln>
-          <a:effectLst/>
           <a:effectLst>
             <a:outerShdw blurRad="90000" dist="38000" dir="5400000" rotWithShape="0">
               <a:srgbClr val="20242E">
@@ -13281,7 +13250,6 @@
               <a:srgbClr val="E4E3DE"/>
             </a:solidFill>
           </a:ln>
-          <a:effectLst/>
           <a:effectLst>
             <a:outerShdw blurRad="90000" dist="38000" dir="5400000" rotWithShape="0">
               <a:srgbClr val="20242E">
@@ -13450,7 +13418,6 @@
               <a:srgbClr val="E4E3DE"/>
             </a:solidFill>
           </a:ln>
-          <a:effectLst/>
           <a:effectLst>
             <a:outerShdw blurRad="90000" dist="38000" dir="5400000" rotWithShape="0">
               <a:srgbClr val="20242E">
@@ -13619,7 +13586,6 @@
               <a:srgbClr val="E4E3DE"/>
             </a:solidFill>
           </a:ln>
-          <a:effectLst/>
           <a:effectLst>
             <a:outerShdw blurRad="90000" dist="38000" dir="5400000" rotWithShape="0">
               <a:srgbClr val="20242E">
@@ -13788,7 +13754,6 @@
               <a:srgbClr val="E4E3DE"/>
             </a:solidFill>
           </a:ln>
-          <a:effectLst/>
           <a:effectLst>
             <a:outerShdw blurRad="90000" dist="38000" dir="5400000" rotWithShape="0">
               <a:srgbClr val="20242E">
@@ -13957,7 +13922,6 @@
               <a:srgbClr val="E4E3DE"/>
             </a:solidFill>
           </a:ln>
-          <a:effectLst/>
           <a:effectLst>
             <a:outerShdw blurRad="90000" dist="38000" dir="5400000" rotWithShape="0">
               <a:srgbClr val="20242E">
@@ -14126,7 +14090,6 @@
               <a:srgbClr val="E4E3DE"/>
             </a:solidFill>
           </a:ln>
-          <a:effectLst/>
           <a:effectLst>
             <a:outerShdw blurRad="90000" dist="38000" dir="5400000" rotWithShape="0">
               <a:srgbClr val="20242E">
@@ -14295,7 +14258,6 @@
               <a:srgbClr val="E4E3DE"/>
             </a:solidFill>
           </a:ln>
-          <a:effectLst/>
           <a:effectLst>
             <a:outerShdw blurRad="90000" dist="38000" dir="5400000" rotWithShape="0">
               <a:srgbClr val="20242E">
@@ -15044,7 +15006,6 @@
               <a:srgbClr val="E4E3DE"/>
             </a:solidFill>
           </a:ln>
-          <a:effectLst/>
           <a:effectLst>
             <a:outerShdw blurRad="90000" dist="38000" dir="5400000" rotWithShape="0">
               <a:srgbClr val="20242E">
@@ -15999,7 +15960,6 @@
               <a:srgbClr val="D64550"/>
             </a:solidFill>
           </a:ln>
-          <a:effectLst/>
           <a:effectLst>
             <a:outerShdw blurRad="90000" dist="38000" dir="5400000" rotWithShape="0">
               <a:srgbClr val="20242E">
@@ -16748,7 +16708,6 @@
               <a:srgbClr val="E4E3DE"/>
             </a:solidFill>
           </a:ln>
-          <a:effectLst/>
           <a:effectLst>
             <a:outerShdw blurRad="90000" dist="38000" dir="5400000" rotWithShape="0">
               <a:srgbClr val="20242E">
@@ -16959,7 +16918,6 @@
               <a:srgbClr val="E4E3DE"/>
             </a:solidFill>
           </a:ln>
-          <a:effectLst/>
           <a:effectLst>
             <a:outerShdw blurRad="90000" dist="38000" dir="5400000" rotWithShape="0">
               <a:srgbClr val="20242E">
@@ -17170,7 +17128,6 @@
               <a:srgbClr val="D64550"/>
             </a:solidFill>
           </a:ln>
-          <a:effectLst/>
           <a:effectLst>
             <a:outerShdw blurRad="90000" dist="38000" dir="5400000" rotWithShape="0">
               <a:srgbClr val="20242E">
@@ -18068,7 +18025,6 @@
               <a:srgbClr val="E4E3DE"/>
             </a:solidFill>
           </a:ln>
-          <a:effectLst/>
           <a:effectLst>
             <a:outerShdw blurRad="90000" dist="38000" dir="5400000" rotWithShape="0">
               <a:srgbClr val="20242E">
@@ -18492,7 +18448,6 @@
               <a:srgbClr val="E4E3DE"/>
             </a:solidFill>
           </a:ln>
-          <a:effectLst/>
           <a:effectLst>
             <a:outerShdw blurRad="90000" dist="38000" dir="5400000" rotWithShape="0">
               <a:srgbClr val="20242E">
@@ -18862,7 +18817,6 @@
               <a:srgbClr val="E4E3DE"/>
             </a:solidFill>
           </a:ln>
-          <a:effectLst/>
           <a:effectLst>
             <a:outerShdw blurRad="90000" dist="38000" dir="5400000" rotWithShape="0">
               <a:srgbClr val="20242E">
@@ -19706,7 +19660,6 @@
               <a:srgbClr val="D64550"/>
             </a:solidFill>
           </a:ln>
-          <a:effectLst/>
           <a:effectLst>
             <a:outerShdw blurRad="90000" dist="38000" dir="5400000" rotWithShape="0">
               <a:srgbClr val="20242E">
@@ -20076,7 +20029,6 @@
               <a:srgbClr val="E4E3DE"/>
             </a:solidFill>
           </a:ln>
-          <a:effectLst/>
           <a:effectLst>
             <a:outerShdw blurRad="90000" dist="38000" dir="5400000" rotWithShape="0">
               <a:srgbClr val="20242E">
@@ -21528,7 +21480,6 @@
               <a:srgbClr val="E4E3DE"/>
             </a:solidFill>
           </a:ln>
-          <a:effectLst/>
           <a:effectLst>
             <a:outerShdw blurRad="90000" dist="38000" dir="5400000" rotWithShape="0">
               <a:srgbClr val="20242E">
@@ -21965,7 +21916,6 @@
               <a:srgbClr val="D64550"/>
             </a:solidFill>
           </a:ln>
-          <a:effectLst/>
           <a:effectLst>
             <a:outerShdw blurRad="90000" dist="38000" dir="5400000" rotWithShape="0">
               <a:srgbClr val="20242E">
@@ -22874,7 +22824,6 @@
               <a:srgbClr val="E4E3DE"/>
             </a:solidFill>
           </a:ln>
-          <a:effectLst/>
           <a:effectLst>
             <a:outerShdw blurRad="90000" dist="38000" dir="5400000" rotWithShape="0">
               <a:srgbClr val="20242E">
@@ -23163,7 +23112,6 @@
               <a:srgbClr val="D64550"/>
             </a:solidFill>
           </a:ln>
-          <a:effectLst/>
           <a:effectLst>
             <a:outerShdw blurRad="90000" dist="38000" dir="5400000" rotWithShape="0">
               <a:srgbClr val="20242E">
@@ -23428,7 +23376,6 @@
               <a:srgbClr val="D64550"/>
             </a:solidFill>
           </a:ln>
-          <a:effectLst/>
           <a:effectLst>
             <a:outerShdw blurRad="90000" dist="38000" dir="5400000" rotWithShape="0">
               <a:srgbClr val="20242E">
@@ -24541,7 +24488,6 @@
               <a:srgbClr val="E4E3DE"/>
             </a:solidFill>
           </a:ln>
-          <a:effectLst/>
           <a:effectLst>
             <a:outerShdw blurRad="90000" dist="38000" dir="5400000" rotWithShape="0">
               <a:srgbClr val="20242E">
